--- a/public/fun/pack/pptx/news/카드뉴스_40_오늘의한마디_붕어빵포장마차.pptx
+++ b/public/fun/pack/pptx/news/카드뉴스_40_오늘의한마디_붕어빵포장마차.pptx
@@ -3287,14 +3287,6 @@
 <file path=ppt/slides/slide1.xml><?xml version="1.0" encoding="utf-8"?>
 <p:sld xmlns:a="http://schemas.openxmlformats.org/drawingml/2006/main" xmlns:p="http://schemas.openxmlformats.org/presentationml/2006/main" xmlns:r="http://schemas.openxmlformats.org/officeDocument/2006/relationships">
   <p:cSld>
-    <p:bg>
-      <p:bgPr>
-        <a:solidFill>
-          <a:srgbClr val="FFFFFF"/>
-        </a:solidFill>
-        <a:effectLst/>
-      </p:bgPr>
-    </p:bg>
     <p:spTree>
       <p:nvGrpSpPr>
         <p:cNvPr id="1" name=""/>
@@ -3302,383 +3294,30 @@
         <p:nvPr/>
       </p:nvGrpSpPr>
       <p:grpSpPr/>
-      <p:sp>
-        <p:nvSpPr>
-          <p:cNvPr id="3" name="장식"/>
-          <p:cNvSpPr/>
+      <p:pic>
+        <p:nvPicPr>
+          <p:cNvPr id="3" name="표지 그림" descr="news-40.jpg"/>
+          <p:cNvPicPr>
+            <a:picLocks noChangeAspect="1"/>
+          </p:cNvPicPr>
           <p:nvPr/>
-        </p:nvSpPr>
-        <p:spPr>
-          <a:xfrm>
-            <a:off x="0" y="2057400"/>
-            <a:ext cx="5760720" cy="1828800"/>
-          </a:xfrm>
-          <a:prstGeom prst="homePlate">
-            <a:avLst/>
-          </a:prstGeom>
-          <a:solidFill>
-            <a:srgbClr val="AE7429"/>
-          </a:solidFill>
-          <a:ln>
-            <a:noFill/>
-          </a:ln>
-        </p:spPr>
-        <p:txBody>
-          <a:bodyPr rtlCol="0" anchor="ctr"/>
-          <a:lstStyle/>
-          <a:p>
-            <a:pPr algn="ctr"/>
-          </a:p>
-        </p:txBody>
-      </p:sp>
-      <p:sp>
-        <p:nvSpPr>
-          <p:cNvPr id="4" name="장식"/>
-          <p:cNvSpPr/>
-          <p:nvPr/>
-        </p:nvSpPr>
-        <p:spPr>
-          <a:xfrm>
-            <a:off x="0" y="3886200"/>
-            <a:ext cx="5349240" cy="64008"/>
+        </p:nvPicPr>
+        <p:blipFill>
+          <a:blip r:embed="rId2"/>
+          <a:stretch>
+            <a:fillRect/>
+          </a:stretch>
+        </p:blipFill>
+        <p:spPr>
+          <a:xfrm>
+            <a:off x="0" y="0"/>
+            <a:ext cx="6858000" cy="6858000"/>
           </a:xfrm>
           <a:prstGeom prst="rect">
             <a:avLst/>
           </a:prstGeom>
-          <a:solidFill>
-            <a:srgbClr val="3B8B91"/>
-          </a:solidFill>
-          <a:ln>
-            <a:noFill/>
-          </a:ln>
-        </p:spPr>
-        <p:txBody>
-          <a:bodyPr rtlCol="0" anchor="ctr"/>
-          <a:lstStyle/>
-          <a:p>
-            <a:pPr algn="ctr"/>
-          </a:p>
-        </p:txBody>
-      </p:sp>
-      <p:sp>
-        <p:nvSpPr>
-          <p:cNvPr id="5" name="장식"/>
-          <p:cNvSpPr/>
-          <p:nvPr/>
-        </p:nvSpPr>
-        <p:spPr>
-          <a:xfrm>
-            <a:off x="4570092" y="704815"/>
-            <a:ext cx="452864" cy="452864"/>
-          </a:xfrm>
-          <a:prstGeom prst="ellipse">
-            <a:avLst/>
-          </a:prstGeom>
-          <a:solidFill>
-            <a:srgbClr val="AE7429"/>
-          </a:solidFill>
-          <a:ln>
-            <a:noFill/>
-          </a:ln>
-        </p:spPr>
-        <p:txBody>
-          <a:bodyPr rtlCol="0" anchor="ctr"/>
-          <a:lstStyle/>
-          <a:p>
-            <a:pPr algn="ctr"/>
-          </a:p>
-        </p:txBody>
-      </p:sp>
-      <p:sp>
-        <p:nvSpPr>
-          <p:cNvPr id="6" name="장식"/>
-          <p:cNvSpPr/>
-          <p:nvPr/>
-        </p:nvSpPr>
-        <p:spPr>
-          <a:xfrm>
-            <a:off x="5901455" y="856829"/>
-            <a:ext cx="275764" cy="275764"/>
-          </a:xfrm>
-          <a:prstGeom prst="ellipse">
-            <a:avLst/>
-          </a:prstGeom>
-          <a:solidFill>
-            <a:srgbClr val="F5E3CC"/>
-          </a:solidFill>
-          <a:ln>
-            <a:noFill/>
-          </a:ln>
-        </p:spPr>
-        <p:txBody>
-          <a:bodyPr rtlCol="0" anchor="ctr"/>
-          <a:lstStyle/>
-          <a:p>
-            <a:pPr algn="ctr"/>
-          </a:p>
-        </p:txBody>
-      </p:sp>
-      <p:sp>
-        <p:nvSpPr>
-          <p:cNvPr id="7" name="장식"/>
-          <p:cNvSpPr/>
-          <p:nvPr/>
-        </p:nvSpPr>
-        <p:spPr>
-          <a:xfrm>
-            <a:off x="6552446" y="2492187"/>
-            <a:ext cx="292227" cy="292227"/>
-          </a:xfrm>
-          <a:prstGeom prst="ellipse">
-            <a:avLst/>
-          </a:prstGeom>
-          <a:solidFill>
-            <a:srgbClr val="3B8B91"/>
-          </a:solidFill>
-          <a:ln>
-            <a:noFill/>
-          </a:ln>
-        </p:spPr>
-        <p:txBody>
-          <a:bodyPr rtlCol="0" anchor="ctr"/>
-          <a:lstStyle/>
-          <a:p>
-            <a:pPr algn="ctr"/>
-          </a:p>
-        </p:txBody>
-      </p:sp>
-      <p:sp>
-        <p:nvSpPr>
-          <p:cNvPr id="8" name="장식"/>
-          <p:cNvSpPr/>
-          <p:nvPr/>
-        </p:nvSpPr>
-        <p:spPr>
-          <a:xfrm>
-            <a:off x="6162350" y="963247"/>
-            <a:ext cx="216899" cy="216899"/>
-          </a:xfrm>
-          <a:prstGeom prst="ellipse">
-            <a:avLst/>
-          </a:prstGeom>
-          <a:solidFill>
-            <a:srgbClr val="AE7429"/>
-          </a:solidFill>
-          <a:ln>
-            <a:noFill/>
-          </a:ln>
-        </p:spPr>
-        <p:txBody>
-          <a:bodyPr rtlCol="0" anchor="ctr"/>
-          <a:lstStyle/>
-          <a:p>
-            <a:pPr algn="ctr"/>
-          </a:p>
-        </p:txBody>
-      </p:sp>
-      <p:sp>
-        <p:nvSpPr>
-          <p:cNvPr id="9" name="장식"/>
-          <p:cNvSpPr/>
-          <p:nvPr/>
-        </p:nvSpPr>
-        <p:spPr>
-          <a:xfrm>
-            <a:off x="4899137" y="299863"/>
-            <a:ext cx="236902" cy="236902"/>
-          </a:xfrm>
-          <a:prstGeom prst="ellipse">
-            <a:avLst/>
-          </a:prstGeom>
-          <a:solidFill>
-            <a:srgbClr val="F5E3CC"/>
-          </a:solidFill>
-          <a:ln>
-            <a:noFill/>
-          </a:ln>
-        </p:spPr>
-        <p:txBody>
-          <a:bodyPr rtlCol="0" anchor="ctr"/>
-          <a:lstStyle/>
-          <a:p>
-            <a:pPr algn="ctr"/>
-          </a:p>
-        </p:txBody>
-      </p:sp>
-      <p:sp>
-        <p:nvSpPr>
-          <p:cNvPr id="10" name="장식"/>
-          <p:cNvSpPr/>
-          <p:nvPr/>
-        </p:nvSpPr>
-        <p:spPr>
-          <a:xfrm>
-            <a:off x="6977876" y="2282743"/>
-            <a:ext cx="391317" cy="391317"/>
-          </a:xfrm>
-          <a:prstGeom prst="ellipse">
-            <a:avLst/>
-          </a:prstGeom>
-          <a:solidFill>
-            <a:srgbClr val="3B8B91"/>
-          </a:solidFill>
-          <a:ln>
-            <a:noFill/>
-          </a:ln>
-        </p:spPr>
-        <p:txBody>
-          <a:bodyPr rtlCol="0" anchor="ctr"/>
-          <a:lstStyle/>
-          <a:p>
-            <a:pPr algn="ctr"/>
-          </a:p>
-        </p:txBody>
-      </p:sp>
-      <p:sp>
-        <p:nvSpPr>
-          <p:cNvPr id="11" name="장식"/>
-          <p:cNvSpPr/>
-          <p:nvPr/>
-        </p:nvSpPr>
-        <p:spPr>
-          <a:xfrm>
-            <a:off x="6305761" y="442115"/>
-            <a:ext cx="455801" cy="455801"/>
-          </a:xfrm>
-          <a:prstGeom prst="ellipse">
-            <a:avLst/>
-          </a:prstGeom>
-          <a:solidFill>
-            <a:srgbClr val="AE7429"/>
-          </a:solidFill>
-          <a:ln>
-            <a:noFill/>
-          </a:ln>
-        </p:spPr>
-        <p:txBody>
-          <a:bodyPr rtlCol="0" anchor="ctr"/>
-          <a:lstStyle/>
-          <a:p>
-            <a:pPr algn="ctr"/>
-          </a:p>
-        </p:txBody>
-      </p:sp>
-      <p:sp>
-        <p:nvSpPr>
-          <p:cNvPr id="12" name="장식"/>
-          <p:cNvSpPr/>
-          <p:nvPr/>
-        </p:nvSpPr>
-        <p:spPr>
-          <a:xfrm>
-            <a:off x="5519281" y="489281"/>
-            <a:ext cx="358123" cy="358123"/>
-          </a:xfrm>
-          <a:prstGeom prst="ellipse">
-            <a:avLst/>
-          </a:prstGeom>
-          <a:solidFill>
-            <a:srgbClr val="F5E3CC"/>
-          </a:solidFill>
-          <a:ln>
-            <a:noFill/>
-          </a:ln>
-        </p:spPr>
-        <p:txBody>
-          <a:bodyPr rtlCol="0" anchor="ctr"/>
-          <a:lstStyle/>
-          <a:p>
-            <a:pPr algn="ctr"/>
-          </a:p>
-        </p:txBody>
-      </p:sp>
-      <p:sp>
-        <p:nvSpPr>
-          <p:cNvPr id="13" name="장식"/>
-          <p:cNvSpPr/>
-          <p:nvPr/>
-        </p:nvSpPr>
-        <p:spPr>
-          <a:xfrm>
-            <a:off x="7171730" y="1333302"/>
-            <a:ext cx="269303" cy="269303"/>
-          </a:xfrm>
-          <a:prstGeom prst="ellipse">
-            <a:avLst/>
-          </a:prstGeom>
-          <a:solidFill>
-            <a:srgbClr val="3B8B91"/>
-          </a:solidFill>
-          <a:ln>
-            <a:noFill/>
-          </a:ln>
-        </p:spPr>
-        <p:txBody>
-          <a:bodyPr rtlCol="0" anchor="ctr"/>
-          <a:lstStyle/>
-          <a:p>
-            <a:pPr algn="ctr"/>
-          </a:p>
-        </p:txBody>
-      </p:sp>
-      <p:sp>
-        <p:nvSpPr>
-          <p:cNvPr id="14" name="장식"/>
-          <p:cNvSpPr/>
-          <p:nvPr/>
-        </p:nvSpPr>
-        <p:spPr>
-          <a:xfrm>
-            <a:off x="6615073" y="1757165"/>
-            <a:ext cx="317138" cy="317138"/>
-          </a:xfrm>
-          <a:prstGeom prst="ellipse">
-            <a:avLst/>
-          </a:prstGeom>
-          <a:solidFill>
-            <a:srgbClr val="AE7429"/>
-          </a:solidFill>
-          <a:ln>
-            <a:noFill/>
-          </a:ln>
-        </p:spPr>
-        <p:txBody>
-          <a:bodyPr rtlCol="0" anchor="ctr"/>
-          <a:lstStyle/>
-          <a:p>
-            <a:pPr algn="ctr"/>
-          </a:p>
-        </p:txBody>
-      </p:sp>
-      <p:sp>
-        <p:nvSpPr>
-          <p:cNvPr id="15" name="장식"/>
-          <p:cNvSpPr/>
-          <p:nvPr/>
-        </p:nvSpPr>
-        <p:spPr>
-          <a:xfrm>
-            <a:off x="4970957" y="74145"/>
-            <a:ext cx="370756" cy="370756"/>
-          </a:xfrm>
-          <a:prstGeom prst="ellipse">
-            <a:avLst/>
-          </a:prstGeom>
-          <a:solidFill>
-            <a:srgbClr val="F5E3CC"/>
-          </a:solidFill>
-          <a:ln>
-            <a:noFill/>
-          </a:ln>
-        </p:spPr>
-        <p:txBody>
-          <a:bodyPr rtlCol="0" anchor="ctr"/>
-          <a:lstStyle/>
-          <a:p>
-            <a:pPr algn="ctr"/>
-          </a:p>
-        </p:txBody>
-      </p:sp>
+        </p:spPr>
+      </p:pic>
       <p:sp>
         <p:nvSpPr>
           <p:cNvPr id="2" name="Title 1"/>
@@ -3691,8 +3330,8 @@
         </p:nvSpPr>
         <p:spPr>
           <a:xfrm>
-            <a:off x="411479" y="2167128"/>
-            <a:ext cx="4937759" cy="1609344"/>
+            <a:off x="685800" y="960120"/>
+            <a:ext cx="5486400" cy="1463040"/>
           </a:xfrm>
         </p:spPr>
         <p:txBody>
@@ -3709,24 +3348,24 @@
             <a:r>
               <a:rPr sz="3000" b="1" i="0">
                 <a:solidFill>
-                  <a:srgbClr val="FFFFFF"/>
+                  <a:srgbClr val="5B3D15"/>
                 </a:solidFill>
               </a:rPr>
-              <a:t>붕어빵 같은 겨울 행복</a:t>
-            </a:r>
-          </a:p>
-        </p:txBody>
-      </p:sp>
-      <p:sp>
-        <p:nvSpPr>
-          <p:cNvPr id="16" name="한 줄 문구"/>
+              <a:t>서두르지 않아도 됩니다</a:t>
+            </a:r>
+          </a:p>
+        </p:txBody>
+      </p:sp>
+      <p:sp>
+        <p:nvSpPr>
+          <p:cNvPr id="4" name="한 줄 문구"/>
           <p:cNvSpPr txBox="1"/>
           <p:nvPr/>
         </p:nvSpPr>
         <p:spPr>
           <a:xfrm>
-            <a:off x="411479" y="4160520"/>
-            <a:ext cx="4800600" cy="822960"/>
+            <a:off x="685800" y="2560320"/>
+            <a:ext cx="5486400" cy="822960"/>
           </a:xfrm>
           <a:prstGeom prst="rect">
             <a:avLst/>
@@ -3757,14 +3396,14 @@
       </p:sp>
       <p:sp>
         <p:nvSpPr>
-          <p:cNvPr id="17" name="안내 문구"/>
+          <p:cNvPr id="5" name="안내 문구"/>
           <p:cNvSpPr txBox="1"/>
           <p:nvPr/>
         </p:nvSpPr>
         <p:spPr>
           <a:xfrm>
-            <a:off x="411479" y="5029200"/>
-            <a:ext cx="4800600" cy="914400"/>
+            <a:off x="685800" y="3429000"/>
+            <a:ext cx="5486400" cy="914400"/>
           </a:xfrm>
           <a:prstGeom prst="rect">
             <a:avLst/>
@@ -3850,325 +3489,6 @@
       </p:sp>
       <p:sp>
         <p:nvSpPr>
-          <p:cNvPr id="4" name="장식"/>
-          <p:cNvSpPr/>
-          <p:nvPr/>
-        </p:nvSpPr>
-        <p:spPr>
-          <a:xfrm>
-            <a:off x="5357381" y="489607"/>
-            <a:ext cx="195353" cy="195353"/>
-          </a:xfrm>
-          <a:prstGeom prst="ellipse">
-            <a:avLst/>
-          </a:prstGeom>
-          <a:solidFill>
-            <a:srgbClr val="AE7429"/>
-          </a:solidFill>
-          <a:ln>
-            <a:noFill/>
-          </a:ln>
-        </p:spPr>
-        <p:txBody>
-          <a:bodyPr rtlCol="0" anchor="ctr"/>
-          <a:lstStyle/>
-          <a:p>
-            <a:pPr algn="ctr"/>
-          </a:p>
-        </p:txBody>
-      </p:sp>
-      <p:sp>
-        <p:nvSpPr>
-          <p:cNvPr id="5" name="장식"/>
-          <p:cNvSpPr/>
-          <p:nvPr/>
-        </p:nvSpPr>
-        <p:spPr>
-          <a:xfrm>
-            <a:off x="5931695" y="555182"/>
-            <a:ext cx="118957" cy="118957"/>
-          </a:xfrm>
-          <a:prstGeom prst="ellipse">
-            <a:avLst/>
-          </a:prstGeom>
-          <a:solidFill>
-            <a:srgbClr val="F5E3CC"/>
-          </a:solidFill>
-          <a:ln>
-            <a:noFill/>
-          </a:ln>
-        </p:spPr>
-        <p:txBody>
-          <a:bodyPr rtlCol="0" anchor="ctr"/>
-          <a:lstStyle/>
-          <a:p>
-            <a:pPr algn="ctr"/>
-          </a:p>
-        </p:txBody>
-      </p:sp>
-      <p:sp>
-        <p:nvSpPr>
-          <p:cNvPr id="6" name="장식"/>
-          <p:cNvSpPr/>
-          <p:nvPr/>
-        </p:nvSpPr>
-        <p:spPr>
-          <a:xfrm>
-            <a:off x="6212514" y="1260630"/>
-            <a:ext cx="126058" cy="126058"/>
-          </a:xfrm>
-          <a:prstGeom prst="ellipse">
-            <a:avLst/>
-          </a:prstGeom>
-          <a:solidFill>
-            <a:srgbClr val="3B8B91"/>
-          </a:solidFill>
-          <a:ln>
-            <a:noFill/>
-          </a:ln>
-        </p:spPr>
-        <p:txBody>
-          <a:bodyPr rtlCol="0" anchor="ctr"/>
-          <a:lstStyle/>
-          <a:p>
-            <a:pPr algn="ctr"/>
-          </a:p>
-        </p:txBody>
-      </p:sp>
-      <p:sp>
-        <p:nvSpPr>
-          <p:cNvPr id="7" name="장식"/>
-          <p:cNvSpPr/>
-          <p:nvPr/>
-        </p:nvSpPr>
-        <p:spPr>
-          <a:xfrm>
-            <a:off x="6044238" y="601087"/>
-            <a:ext cx="93564" cy="93564"/>
-          </a:xfrm>
-          <a:prstGeom prst="ellipse">
-            <a:avLst/>
-          </a:prstGeom>
-          <a:solidFill>
-            <a:srgbClr val="AE7429"/>
-          </a:solidFill>
-          <a:ln>
-            <a:noFill/>
-          </a:ln>
-        </p:spPr>
-        <p:txBody>
-          <a:bodyPr rtlCol="0" anchor="ctr"/>
-          <a:lstStyle/>
-          <a:p>
-            <a:pPr algn="ctr"/>
-          </a:p>
-        </p:txBody>
-      </p:sp>
-      <p:sp>
-        <p:nvSpPr>
-          <p:cNvPr id="8" name="장식"/>
-          <p:cNvSpPr/>
-          <p:nvPr/>
-        </p:nvSpPr>
-        <p:spPr>
-          <a:xfrm>
-            <a:off x="5499322" y="314922"/>
-            <a:ext cx="102193" cy="102193"/>
-          </a:xfrm>
-          <a:prstGeom prst="ellipse">
-            <a:avLst/>
-          </a:prstGeom>
-          <a:solidFill>
-            <a:srgbClr val="F5E3CC"/>
-          </a:solidFill>
-          <a:ln>
-            <a:noFill/>
-          </a:ln>
-        </p:spPr>
-        <p:txBody>
-          <a:bodyPr rtlCol="0" anchor="ctr"/>
-          <a:lstStyle/>
-          <a:p>
-            <a:pPr algn="ctr"/>
-          </a:p>
-        </p:txBody>
-      </p:sp>
-      <p:sp>
-        <p:nvSpPr>
-          <p:cNvPr id="9" name="장식"/>
-          <p:cNvSpPr/>
-          <p:nvPr/>
-        </p:nvSpPr>
-        <p:spPr>
-          <a:xfrm>
-            <a:off x="6396033" y="1170282"/>
-            <a:ext cx="168803" cy="168803"/>
-          </a:xfrm>
-          <a:prstGeom prst="ellipse">
-            <a:avLst/>
-          </a:prstGeom>
-          <a:solidFill>
-            <a:srgbClr val="3B8B91"/>
-          </a:solidFill>
-          <a:ln>
-            <a:noFill/>
-          </a:ln>
-        </p:spPr>
-        <p:txBody>
-          <a:bodyPr rtlCol="0" anchor="ctr"/>
-          <a:lstStyle/>
-          <a:p>
-            <a:pPr algn="ctr"/>
-          </a:p>
-        </p:txBody>
-      </p:sp>
-      <p:sp>
-        <p:nvSpPr>
-          <p:cNvPr id="10" name="장식"/>
-          <p:cNvSpPr/>
-          <p:nvPr/>
-        </p:nvSpPr>
-        <p:spPr>
-          <a:xfrm>
-            <a:off x="6106101" y="376285"/>
-            <a:ext cx="196620" cy="196620"/>
-          </a:xfrm>
-          <a:prstGeom prst="ellipse">
-            <a:avLst/>
-          </a:prstGeom>
-          <a:solidFill>
-            <a:srgbClr val="AE7429"/>
-          </a:solidFill>
-          <a:ln>
-            <a:noFill/>
-          </a:ln>
-        </p:spPr>
-        <p:txBody>
-          <a:bodyPr rtlCol="0" anchor="ctr"/>
-          <a:lstStyle/>
-          <a:p>
-            <a:pPr algn="ctr"/>
-          </a:p>
-        </p:txBody>
-      </p:sp>
-      <p:sp>
-        <p:nvSpPr>
-          <p:cNvPr id="11" name="장식"/>
-          <p:cNvSpPr/>
-          <p:nvPr/>
-        </p:nvSpPr>
-        <p:spPr>
-          <a:xfrm>
-            <a:off x="5766836" y="396632"/>
-            <a:ext cx="154484" cy="154484"/>
-          </a:xfrm>
-          <a:prstGeom prst="ellipse">
-            <a:avLst/>
-          </a:prstGeom>
-          <a:solidFill>
-            <a:srgbClr val="F5E3CC"/>
-          </a:solidFill>
-          <a:ln>
-            <a:noFill/>
-          </a:ln>
-        </p:spPr>
-        <p:txBody>
-          <a:bodyPr rtlCol="0" anchor="ctr"/>
-          <a:lstStyle/>
-          <a:p>
-            <a:pPr algn="ctr"/>
-          </a:p>
-        </p:txBody>
-      </p:sp>
-      <p:sp>
-        <p:nvSpPr>
-          <p:cNvPr id="12" name="장식"/>
-          <p:cNvSpPr/>
-          <p:nvPr/>
-        </p:nvSpPr>
-        <p:spPr>
-          <a:xfrm>
-            <a:off x="6479657" y="760719"/>
-            <a:ext cx="116170" cy="116170"/>
-          </a:xfrm>
-          <a:prstGeom prst="ellipse">
-            <a:avLst/>
-          </a:prstGeom>
-          <a:solidFill>
-            <a:srgbClr val="3B8B91"/>
-          </a:solidFill>
-          <a:ln>
-            <a:noFill/>
-          </a:ln>
-        </p:spPr>
-        <p:txBody>
-          <a:bodyPr rtlCol="0" anchor="ctr"/>
-          <a:lstStyle/>
-          <a:p>
-            <a:pPr algn="ctr"/>
-          </a:p>
-        </p:txBody>
-      </p:sp>
-      <p:sp>
-        <p:nvSpPr>
-          <p:cNvPr id="13" name="장식"/>
-          <p:cNvSpPr/>
-          <p:nvPr/>
-        </p:nvSpPr>
-        <p:spPr>
-          <a:xfrm>
-            <a:off x="6239530" y="943562"/>
-            <a:ext cx="136804" cy="136804"/>
-          </a:xfrm>
-          <a:prstGeom prst="ellipse">
-            <a:avLst/>
-          </a:prstGeom>
-          <a:solidFill>
-            <a:srgbClr val="AE7429"/>
-          </a:solidFill>
-          <a:ln>
-            <a:noFill/>
-          </a:ln>
-        </p:spPr>
-        <p:txBody>
-          <a:bodyPr rtlCol="0" anchor="ctr"/>
-          <a:lstStyle/>
-          <a:p>
-            <a:pPr algn="ctr"/>
-          </a:p>
-        </p:txBody>
-      </p:sp>
-      <p:sp>
-        <p:nvSpPr>
-          <p:cNvPr id="14" name="장식"/>
-          <p:cNvSpPr/>
-          <p:nvPr/>
-        </p:nvSpPr>
-        <p:spPr>
-          <a:xfrm>
-            <a:off x="5530304" y="217553"/>
-            <a:ext cx="159934" cy="159934"/>
-          </a:xfrm>
-          <a:prstGeom prst="ellipse">
-            <a:avLst/>
-          </a:prstGeom>
-          <a:solidFill>
-            <a:srgbClr val="F5E3CC"/>
-          </a:solidFill>
-          <a:ln>
-            <a:noFill/>
-          </a:ln>
-        </p:spPr>
-        <p:txBody>
-          <a:bodyPr rtlCol="0" anchor="ctr"/>
-          <a:lstStyle/>
-          <a:p>
-            <a:pPr algn="ctr"/>
-          </a:p>
-        </p:txBody>
-      </p:sp>
-      <p:sp>
-        <p:nvSpPr>
           <p:cNvPr id="2" name="Title 1"/>
           <p:cNvSpPr>
             <a:spLocks noGrp="1"/>
@@ -4200,14 +3520,14 @@
                   <a:srgbClr val="FFFFFF"/>
                 </a:solidFill>
               </a:rPr>
-              <a:t>천천히 가도 괜찮아요</a:t>
-            </a:r>
-          </a:p>
-        </p:txBody>
-      </p:sp>
-      <p:sp>
-        <p:nvSpPr>
-          <p:cNvPr id="15" name="번호"/>
+              <a:t>점심은 거르지 마세요</a:t>
+            </a:r>
+          </a:p>
+        </p:txBody>
+      </p:sp>
+      <p:sp>
+        <p:nvSpPr>
+          <p:cNvPr id="4" name="번호"/>
           <p:cNvSpPr txBox="1"/>
           <p:nvPr/>
         </p:nvSpPr>
@@ -4245,7 +3565,7 @@
       </p:sp>
       <p:sp>
         <p:nvSpPr>
-          <p:cNvPr id="16" name="본문"/>
+          <p:cNvPr id="5" name="본문"/>
           <p:cNvSpPr txBox="1"/>
           <p:nvPr/>
         </p:nvSpPr>
@@ -4276,14 +3596,14 @@
                   <a:srgbClr val="2B2B2B"/>
                 </a:solidFill>
               </a:rPr>
-              <a:t>오늘 하루도 충분히 잘하고 있어요.</a:t>
-            </a:r>
-          </a:p>
-        </p:txBody>
-      </p:sp>
-      <p:sp>
-        <p:nvSpPr>
-          <p:cNvPr id="17" name="쪽 번호"/>
+              <a:t>바빠도 한 끼는 앉아서 먹어요. 오후가 달라져요.</a:t>
+            </a:r>
+          </a:p>
+        </p:txBody>
+      </p:sp>
+      <p:sp>
+        <p:nvSpPr>
+          <p:cNvPr id="6" name="쪽 번호"/>
           <p:cNvSpPr txBox="1"/>
           <p:nvPr/>
         </p:nvSpPr>
@@ -4376,325 +3696,6 @@
       </p:sp>
       <p:sp>
         <p:nvSpPr>
-          <p:cNvPr id="4" name="장식"/>
-          <p:cNvSpPr/>
-          <p:nvPr/>
-        </p:nvSpPr>
-        <p:spPr>
-          <a:xfrm>
-            <a:off x="5357381" y="489607"/>
-            <a:ext cx="195353" cy="195353"/>
-          </a:xfrm>
-          <a:prstGeom prst="ellipse">
-            <a:avLst/>
-          </a:prstGeom>
-          <a:solidFill>
-            <a:srgbClr val="AE7429"/>
-          </a:solidFill>
-          <a:ln>
-            <a:noFill/>
-          </a:ln>
-        </p:spPr>
-        <p:txBody>
-          <a:bodyPr rtlCol="0" anchor="ctr"/>
-          <a:lstStyle/>
-          <a:p>
-            <a:pPr algn="ctr"/>
-          </a:p>
-        </p:txBody>
-      </p:sp>
-      <p:sp>
-        <p:nvSpPr>
-          <p:cNvPr id="5" name="장식"/>
-          <p:cNvSpPr/>
-          <p:nvPr/>
-        </p:nvSpPr>
-        <p:spPr>
-          <a:xfrm>
-            <a:off x="5931695" y="555182"/>
-            <a:ext cx="118957" cy="118957"/>
-          </a:xfrm>
-          <a:prstGeom prst="ellipse">
-            <a:avLst/>
-          </a:prstGeom>
-          <a:solidFill>
-            <a:srgbClr val="F5E3CC"/>
-          </a:solidFill>
-          <a:ln>
-            <a:noFill/>
-          </a:ln>
-        </p:spPr>
-        <p:txBody>
-          <a:bodyPr rtlCol="0" anchor="ctr"/>
-          <a:lstStyle/>
-          <a:p>
-            <a:pPr algn="ctr"/>
-          </a:p>
-        </p:txBody>
-      </p:sp>
-      <p:sp>
-        <p:nvSpPr>
-          <p:cNvPr id="6" name="장식"/>
-          <p:cNvSpPr/>
-          <p:nvPr/>
-        </p:nvSpPr>
-        <p:spPr>
-          <a:xfrm>
-            <a:off x="6212514" y="1260630"/>
-            <a:ext cx="126058" cy="126058"/>
-          </a:xfrm>
-          <a:prstGeom prst="ellipse">
-            <a:avLst/>
-          </a:prstGeom>
-          <a:solidFill>
-            <a:srgbClr val="3B8B91"/>
-          </a:solidFill>
-          <a:ln>
-            <a:noFill/>
-          </a:ln>
-        </p:spPr>
-        <p:txBody>
-          <a:bodyPr rtlCol="0" anchor="ctr"/>
-          <a:lstStyle/>
-          <a:p>
-            <a:pPr algn="ctr"/>
-          </a:p>
-        </p:txBody>
-      </p:sp>
-      <p:sp>
-        <p:nvSpPr>
-          <p:cNvPr id="7" name="장식"/>
-          <p:cNvSpPr/>
-          <p:nvPr/>
-        </p:nvSpPr>
-        <p:spPr>
-          <a:xfrm>
-            <a:off x="6044238" y="601087"/>
-            <a:ext cx="93564" cy="93564"/>
-          </a:xfrm>
-          <a:prstGeom prst="ellipse">
-            <a:avLst/>
-          </a:prstGeom>
-          <a:solidFill>
-            <a:srgbClr val="AE7429"/>
-          </a:solidFill>
-          <a:ln>
-            <a:noFill/>
-          </a:ln>
-        </p:spPr>
-        <p:txBody>
-          <a:bodyPr rtlCol="0" anchor="ctr"/>
-          <a:lstStyle/>
-          <a:p>
-            <a:pPr algn="ctr"/>
-          </a:p>
-        </p:txBody>
-      </p:sp>
-      <p:sp>
-        <p:nvSpPr>
-          <p:cNvPr id="8" name="장식"/>
-          <p:cNvSpPr/>
-          <p:nvPr/>
-        </p:nvSpPr>
-        <p:spPr>
-          <a:xfrm>
-            <a:off x="5499322" y="314922"/>
-            <a:ext cx="102193" cy="102193"/>
-          </a:xfrm>
-          <a:prstGeom prst="ellipse">
-            <a:avLst/>
-          </a:prstGeom>
-          <a:solidFill>
-            <a:srgbClr val="F5E3CC"/>
-          </a:solidFill>
-          <a:ln>
-            <a:noFill/>
-          </a:ln>
-        </p:spPr>
-        <p:txBody>
-          <a:bodyPr rtlCol="0" anchor="ctr"/>
-          <a:lstStyle/>
-          <a:p>
-            <a:pPr algn="ctr"/>
-          </a:p>
-        </p:txBody>
-      </p:sp>
-      <p:sp>
-        <p:nvSpPr>
-          <p:cNvPr id="9" name="장식"/>
-          <p:cNvSpPr/>
-          <p:nvPr/>
-        </p:nvSpPr>
-        <p:spPr>
-          <a:xfrm>
-            <a:off x="6396033" y="1170282"/>
-            <a:ext cx="168803" cy="168803"/>
-          </a:xfrm>
-          <a:prstGeom prst="ellipse">
-            <a:avLst/>
-          </a:prstGeom>
-          <a:solidFill>
-            <a:srgbClr val="3B8B91"/>
-          </a:solidFill>
-          <a:ln>
-            <a:noFill/>
-          </a:ln>
-        </p:spPr>
-        <p:txBody>
-          <a:bodyPr rtlCol="0" anchor="ctr"/>
-          <a:lstStyle/>
-          <a:p>
-            <a:pPr algn="ctr"/>
-          </a:p>
-        </p:txBody>
-      </p:sp>
-      <p:sp>
-        <p:nvSpPr>
-          <p:cNvPr id="10" name="장식"/>
-          <p:cNvSpPr/>
-          <p:nvPr/>
-        </p:nvSpPr>
-        <p:spPr>
-          <a:xfrm>
-            <a:off x="6106101" y="376285"/>
-            <a:ext cx="196620" cy="196620"/>
-          </a:xfrm>
-          <a:prstGeom prst="ellipse">
-            <a:avLst/>
-          </a:prstGeom>
-          <a:solidFill>
-            <a:srgbClr val="AE7429"/>
-          </a:solidFill>
-          <a:ln>
-            <a:noFill/>
-          </a:ln>
-        </p:spPr>
-        <p:txBody>
-          <a:bodyPr rtlCol="0" anchor="ctr"/>
-          <a:lstStyle/>
-          <a:p>
-            <a:pPr algn="ctr"/>
-          </a:p>
-        </p:txBody>
-      </p:sp>
-      <p:sp>
-        <p:nvSpPr>
-          <p:cNvPr id="11" name="장식"/>
-          <p:cNvSpPr/>
-          <p:nvPr/>
-        </p:nvSpPr>
-        <p:spPr>
-          <a:xfrm>
-            <a:off x="5766836" y="396632"/>
-            <a:ext cx="154484" cy="154484"/>
-          </a:xfrm>
-          <a:prstGeom prst="ellipse">
-            <a:avLst/>
-          </a:prstGeom>
-          <a:solidFill>
-            <a:srgbClr val="F5E3CC"/>
-          </a:solidFill>
-          <a:ln>
-            <a:noFill/>
-          </a:ln>
-        </p:spPr>
-        <p:txBody>
-          <a:bodyPr rtlCol="0" anchor="ctr"/>
-          <a:lstStyle/>
-          <a:p>
-            <a:pPr algn="ctr"/>
-          </a:p>
-        </p:txBody>
-      </p:sp>
-      <p:sp>
-        <p:nvSpPr>
-          <p:cNvPr id="12" name="장식"/>
-          <p:cNvSpPr/>
-          <p:nvPr/>
-        </p:nvSpPr>
-        <p:spPr>
-          <a:xfrm>
-            <a:off x="6479657" y="760719"/>
-            <a:ext cx="116170" cy="116170"/>
-          </a:xfrm>
-          <a:prstGeom prst="ellipse">
-            <a:avLst/>
-          </a:prstGeom>
-          <a:solidFill>
-            <a:srgbClr val="3B8B91"/>
-          </a:solidFill>
-          <a:ln>
-            <a:noFill/>
-          </a:ln>
-        </p:spPr>
-        <p:txBody>
-          <a:bodyPr rtlCol="0" anchor="ctr"/>
-          <a:lstStyle/>
-          <a:p>
-            <a:pPr algn="ctr"/>
-          </a:p>
-        </p:txBody>
-      </p:sp>
-      <p:sp>
-        <p:nvSpPr>
-          <p:cNvPr id="13" name="장식"/>
-          <p:cNvSpPr/>
-          <p:nvPr/>
-        </p:nvSpPr>
-        <p:spPr>
-          <a:xfrm>
-            <a:off x="6239530" y="943562"/>
-            <a:ext cx="136804" cy="136804"/>
-          </a:xfrm>
-          <a:prstGeom prst="ellipse">
-            <a:avLst/>
-          </a:prstGeom>
-          <a:solidFill>
-            <a:srgbClr val="AE7429"/>
-          </a:solidFill>
-          <a:ln>
-            <a:noFill/>
-          </a:ln>
-        </p:spPr>
-        <p:txBody>
-          <a:bodyPr rtlCol="0" anchor="ctr"/>
-          <a:lstStyle/>
-          <a:p>
-            <a:pPr algn="ctr"/>
-          </a:p>
-        </p:txBody>
-      </p:sp>
-      <p:sp>
-        <p:nvSpPr>
-          <p:cNvPr id="14" name="장식"/>
-          <p:cNvSpPr/>
-          <p:nvPr/>
-        </p:nvSpPr>
-        <p:spPr>
-          <a:xfrm>
-            <a:off x="5530304" y="217553"/>
-            <a:ext cx="159934" cy="159934"/>
-          </a:xfrm>
-          <a:prstGeom prst="ellipse">
-            <a:avLst/>
-          </a:prstGeom>
-          <a:solidFill>
-            <a:srgbClr val="F5E3CC"/>
-          </a:solidFill>
-          <a:ln>
-            <a:noFill/>
-          </a:ln>
-        </p:spPr>
-        <p:txBody>
-          <a:bodyPr rtlCol="0" anchor="ctr"/>
-          <a:lstStyle/>
-          <a:p>
-            <a:pPr algn="ctr"/>
-          </a:p>
-        </p:txBody>
-      </p:sp>
-      <p:sp>
-        <p:nvSpPr>
           <p:cNvPr id="2" name="Title 1"/>
           <p:cNvSpPr>
             <a:spLocks noGrp="1"/>
@@ -4726,14 +3727,14 @@
                   <a:srgbClr val="FFFFFF"/>
                 </a:solidFill>
               </a:rPr>
-              <a:t>쉬어 가도 괜찮아요</a:t>
-            </a:r>
-          </a:p>
-        </p:txBody>
-      </p:sp>
-      <p:sp>
-        <p:nvSpPr>
-          <p:cNvPr id="15" name="번호"/>
+              <a:t>전화 한 통 걸어 보세요</a:t>
+            </a:r>
+          </a:p>
+        </p:txBody>
+      </p:sp>
+      <p:sp>
+        <p:nvSpPr>
+          <p:cNvPr id="4" name="번호"/>
           <p:cNvSpPr txBox="1"/>
           <p:nvPr/>
         </p:nvSpPr>
@@ -4771,7 +3772,7 @@
       </p:sp>
       <p:sp>
         <p:nvSpPr>
-          <p:cNvPr id="16" name="본문"/>
+          <p:cNvPr id="5" name="본문"/>
           <p:cNvSpPr txBox="1"/>
           <p:nvPr/>
         </p:nvSpPr>
@@ -4802,14 +3803,14 @@
                   <a:srgbClr val="2B2B2B"/>
                 </a:solidFill>
               </a:rPr>
-              <a:t>잠깐 멈추는 것도 앞으로 가는 방법이에요.</a:t>
-            </a:r>
-          </a:p>
-        </p:txBody>
-      </p:sp>
-      <p:sp>
-        <p:nvSpPr>
-          <p:cNvPr id="17" name="쪽 번호"/>
+              <a:t>문자보다 목소리가 먼저 떠오르는 사람이 있다면 지금 걸어 보세요.</a:t>
+            </a:r>
+          </a:p>
+        </p:txBody>
+      </p:sp>
+      <p:sp>
+        <p:nvSpPr>
+          <p:cNvPr id="6" name="쪽 번호"/>
           <p:cNvSpPr txBox="1"/>
           <p:nvPr/>
         </p:nvSpPr>
@@ -4902,325 +3903,6 @@
       </p:sp>
       <p:sp>
         <p:nvSpPr>
-          <p:cNvPr id="4" name="장식"/>
-          <p:cNvSpPr/>
-          <p:nvPr/>
-        </p:nvSpPr>
-        <p:spPr>
-          <a:xfrm>
-            <a:off x="5357381" y="489607"/>
-            <a:ext cx="195353" cy="195353"/>
-          </a:xfrm>
-          <a:prstGeom prst="ellipse">
-            <a:avLst/>
-          </a:prstGeom>
-          <a:solidFill>
-            <a:srgbClr val="AE7429"/>
-          </a:solidFill>
-          <a:ln>
-            <a:noFill/>
-          </a:ln>
-        </p:spPr>
-        <p:txBody>
-          <a:bodyPr rtlCol="0" anchor="ctr"/>
-          <a:lstStyle/>
-          <a:p>
-            <a:pPr algn="ctr"/>
-          </a:p>
-        </p:txBody>
-      </p:sp>
-      <p:sp>
-        <p:nvSpPr>
-          <p:cNvPr id="5" name="장식"/>
-          <p:cNvSpPr/>
-          <p:nvPr/>
-        </p:nvSpPr>
-        <p:spPr>
-          <a:xfrm>
-            <a:off x="5931695" y="555182"/>
-            <a:ext cx="118957" cy="118957"/>
-          </a:xfrm>
-          <a:prstGeom prst="ellipse">
-            <a:avLst/>
-          </a:prstGeom>
-          <a:solidFill>
-            <a:srgbClr val="F5E3CC"/>
-          </a:solidFill>
-          <a:ln>
-            <a:noFill/>
-          </a:ln>
-        </p:spPr>
-        <p:txBody>
-          <a:bodyPr rtlCol="0" anchor="ctr"/>
-          <a:lstStyle/>
-          <a:p>
-            <a:pPr algn="ctr"/>
-          </a:p>
-        </p:txBody>
-      </p:sp>
-      <p:sp>
-        <p:nvSpPr>
-          <p:cNvPr id="6" name="장식"/>
-          <p:cNvSpPr/>
-          <p:nvPr/>
-        </p:nvSpPr>
-        <p:spPr>
-          <a:xfrm>
-            <a:off x="6212514" y="1260630"/>
-            <a:ext cx="126058" cy="126058"/>
-          </a:xfrm>
-          <a:prstGeom prst="ellipse">
-            <a:avLst/>
-          </a:prstGeom>
-          <a:solidFill>
-            <a:srgbClr val="3B8B91"/>
-          </a:solidFill>
-          <a:ln>
-            <a:noFill/>
-          </a:ln>
-        </p:spPr>
-        <p:txBody>
-          <a:bodyPr rtlCol="0" anchor="ctr"/>
-          <a:lstStyle/>
-          <a:p>
-            <a:pPr algn="ctr"/>
-          </a:p>
-        </p:txBody>
-      </p:sp>
-      <p:sp>
-        <p:nvSpPr>
-          <p:cNvPr id="7" name="장식"/>
-          <p:cNvSpPr/>
-          <p:nvPr/>
-        </p:nvSpPr>
-        <p:spPr>
-          <a:xfrm>
-            <a:off x="6044238" y="601087"/>
-            <a:ext cx="93564" cy="93564"/>
-          </a:xfrm>
-          <a:prstGeom prst="ellipse">
-            <a:avLst/>
-          </a:prstGeom>
-          <a:solidFill>
-            <a:srgbClr val="AE7429"/>
-          </a:solidFill>
-          <a:ln>
-            <a:noFill/>
-          </a:ln>
-        </p:spPr>
-        <p:txBody>
-          <a:bodyPr rtlCol="0" anchor="ctr"/>
-          <a:lstStyle/>
-          <a:p>
-            <a:pPr algn="ctr"/>
-          </a:p>
-        </p:txBody>
-      </p:sp>
-      <p:sp>
-        <p:nvSpPr>
-          <p:cNvPr id="8" name="장식"/>
-          <p:cNvSpPr/>
-          <p:nvPr/>
-        </p:nvSpPr>
-        <p:spPr>
-          <a:xfrm>
-            <a:off x="5499322" y="314922"/>
-            <a:ext cx="102193" cy="102193"/>
-          </a:xfrm>
-          <a:prstGeom prst="ellipse">
-            <a:avLst/>
-          </a:prstGeom>
-          <a:solidFill>
-            <a:srgbClr val="F5E3CC"/>
-          </a:solidFill>
-          <a:ln>
-            <a:noFill/>
-          </a:ln>
-        </p:spPr>
-        <p:txBody>
-          <a:bodyPr rtlCol="0" anchor="ctr"/>
-          <a:lstStyle/>
-          <a:p>
-            <a:pPr algn="ctr"/>
-          </a:p>
-        </p:txBody>
-      </p:sp>
-      <p:sp>
-        <p:nvSpPr>
-          <p:cNvPr id="9" name="장식"/>
-          <p:cNvSpPr/>
-          <p:nvPr/>
-        </p:nvSpPr>
-        <p:spPr>
-          <a:xfrm>
-            <a:off x="6396033" y="1170282"/>
-            <a:ext cx="168803" cy="168803"/>
-          </a:xfrm>
-          <a:prstGeom prst="ellipse">
-            <a:avLst/>
-          </a:prstGeom>
-          <a:solidFill>
-            <a:srgbClr val="3B8B91"/>
-          </a:solidFill>
-          <a:ln>
-            <a:noFill/>
-          </a:ln>
-        </p:spPr>
-        <p:txBody>
-          <a:bodyPr rtlCol="0" anchor="ctr"/>
-          <a:lstStyle/>
-          <a:p>
-            <a:pPr algn="ctr"/>
-          </a:p>
-        </p:txBody>
-      </p:sp>
-      <p:sp>
-        <p:nvSpPr>
-          <p:cNvPr id="10" name="장식"/>
-          <p:cNvSpPr/>
-          <p:nvPr/>
-        </p:nvSpPr>
-        <p:spPr>
-          <a:xfrm>
-            <a:off x="6106101" y="376285"/>
-            <a:ext cx="196620" cy="196620"/>
-          </a:xfrm>
-          <a:prstGeom prst="ellipse">
-            <a:avLst/>
-          </a:prstGeom>
-          <a:solidFill>
-            <a:srgbClr val="AE7429"/>
-          </a:solidFill>
-          <a:ln>
-            <a:noFill/>
-          </a:ln>
-        </p:spPr>
-        <p:txBody>
-          <a:bodyPr rtlCol="0" anchor="ctr"/>
-          <a:lstStyle/>
-          <a:p>
-            <a:pPr algn="ctr"/>
-          </a:p>
-        </p:txBody>
-      </p:sp>
-      <p:sp>
-        <p:nvSpPr>
-          <p:cNvPr id="11" name="장식"/>
-          <p:cNvSpPr/>
-          <p:nvPr/>
-        </p:nvSpPr>
-        <p:spPr>
-          <a:xfrm>
-            <a:off x="5766836" y="396632"/>
-            <a:ext cx="154484" cy="154484"/>
-          </a:xfrm>
-          <a:prstGeom prst="ellipse">
-            <a:avLst/>
-          </a:prstGeom>
-          <a:solidFill>
-            <a:srgbClr val="F5E3CC"/>
-          </a:solidFill>
-          <a:ln>
-            <a:noFill/>
-          </a:ln>
-        </p:spPr>
-        <p:txBody>
-          <a:bodyPr rtlCol="0" anchor="ctr"/>
-          <a:lstStyle/>
-          <a:p>
-            <a:pPr algn="ctr"/>
-          </a:p>
-        </p:txBody>
-      </p:sp>
-      <p:sp>
-        <p:nvSpPr>
-          <p:cNvPr id="12" name="장식"/>
-          <p:cNvSpPr/>
-          <p:nvPr/>
-        </p:nvSpPr>
-        <p:spPr>
-          <a:xfrm>
-            <a:off x="6479657" y="760719"/>
-            <a:ext cx="116170" cy="116170"/>
-          </a:xfrm>
-          <a:prstGeom prst="ellipse">
-            <a:avLst/>
-          </a:prstGeom>
-          <a:solidFill>
-            <a:srgbClr val="3B8B91"/>
-          </a:solidFill>
-          <a:ln>
-            <a:noFill/>
-          </a:ln>
-        </p:spPr>
-        <p:txBody>
-          <a:bodyPr rtlCol="0" anchor="ctr"/>
-          <a:lstStyle/>
-          <a:p>
-            <a:pPr algn="ctr"/>
-          </a:p>
-        </p:txBody>
-      </p:sp>
-      <p:sp>
-        <p:nvSpPr>
-          <p:cNvPr id="13" name="장식"/>
-          <p:cNvSpPr/>
-          <p:nvPr/>
-        </p:nvSpPr>
-        <p:spPr>
-          <a:xfrm>
-            <a:off x="6239530" y="943562"/>
-            <a:ext cx="136804" cy="136804"/>
-          </a:xfrm>
-          <a:prstGeom prst="ellipse">
-            <a:avLst/>
-          </a:prstGeom>
-          <a:solidFill>
-            <a:srgbClr val="AE7429"/>
-          </a:solidFill>
-          <a:ln>
-            <a:noFill/>
-          </a:ln>
-        </p:spPr>
-        <p:txBody>
-          <a:bodyPr rtlCol="0" anchor="ctr"/>
-          <a:lstStyle/>
-          <a:p>
-            <a:pPr algn="ctr"/>
-          </a:p>
-        </p:txBody>
-      </p:sp>
-      <p:sp>
-        <p:nvSpPr>
-          <p:cNvPr id="14" name="장식"/>
-          <p:cNvSpPr/>
-          <p:nvPr/>
-        </p:nvSpPr>
-        <p:spPr>
-          <a:xfrm>
-            <a:off x="5530304" y="217553"/>
-            <a:ext cx="159934" cy="159934"/>
-          </a:xfrm>
-          <a:prstGeom prst="ellipse">
-            <a:avLst/>
-          </a:prstGeom>
-          <a:solidFill>
-            <a:srgbClr val="F5E3CC"/>
-          </a:solidFill>
-          <a:ln>
-            <a:noFill/>
-          </a:ln>
-        </p:spPr>
-        <p:txBody>
-          <a:bodyPr rtlCol="0" anchor="ctr"/>
-          <a:lstStyle/>
-          <a:p>
-            <a:pPr algn="ctr"/>
-          </a:p>
-        </p:txBody>
-      </p:sp>
-      <p:sp>
-        <p:nvSpPr>
           <p:cNvPr id="2" name="Title 1"/>
           <p:cNvSpPr>
             <a:spLocks noGrp="1"/>
@@ -5252,14 +3934,14 @@
                   <a:srgbClr val="FFFFFF"/>
                 </a:solidFill>
               </a:rPr>
-              <a:t>이미 잘하고 있어요</a:t>
-            </a:r>
-          </a:p>
-        </p:txBody>
-      </p:sp>
-      <p:sp>
-        <p:nvSpPr>
-          <p:cNvPr id="15" name="번호"/>
+              <a:t>메모 한 장 남기기</a:t>
+            </a:r>
+          </a:p>
+        </p:txBody>
+      </p:sp>
+      <p:sp>
+        <p:nvSpPr>
+          <p:cNvPr id="4" name="번호"/>
           <p:cNvSpPr txBox="1"/>
           <p:nvPr/>
         </p:nvSpPr>
@@ -5297,7 +3979,7 @@
       </p:sp>
       <p:sp>
         <p:nvSpPr>
-          <p:cNvPr id="16" name="본문"/>
+          <p:cNvPr id="5" name="본문"/>
           <p:cNvSpPr txBox="1"/>
           <p:nvPr/>
         </p:nvSpPr>
@@ -5328,14 +4010,14 @@
                   <a:srgbClr val="2B2B2B"/>
                 </a:solidFill>
               </a:rPr>
-              <a:t>남과 비교하지 말고 어제의 나와 비교해 보세요.</a:t>
-            </a:r>
-          </a:p>
-        </p:txBody>
-      </p:sp>
-      <p:sp>
-        <p:nvSpPr>
-          <p:cNvPr id="17" name="쪽 번호"/>
+              <a:t>생각났을 때 적어 두면 다음 주의 내가 고마워해요.</a:t>
+            </a:r>
+          </a:p>
+        </p:txBody>
+      </p:sp>
+      <p:sp>
+        <p:nvSpPr>
+          <p:cNvPr id="6" name="쪽 번호"/>
           <p:cNvSpPr txBox="1"/>
           <p:nvPr/>
         </p:nvSpPr>
@@ -5428,325 +4110,6 @@
       </p:sp>
       <p:sp>
         <p:nvSpPr>
-          <p:cNvPr id="4" name="장식"/>
-          <p:cNvSpPr/>
-          <p:nvPr/>
-        </p:nvSpPr>
-        <p:spPr>
-          <a:xfrm>
-            <a:off x="5357381" y="489607"/>
-            <a:ext cx="195353" cy="195353"/>
-          </a:xfrm>
-          <a:prstGeom prst="ellipse">
-            <a:avLst/>
-          </a:prstGeom>
-          <a:solidFill>
-            <a:srgbClr val="AE7429"/>
-          </a:solidFill>
-          <a:ln>
-            <a:noFill/>
-          </a:ln>
-        </p:spPr>
-        <p:txBody>
-          <a:bodyPr rtlCol="0" anchor="ctr"/>
-          <a:lstStyle/>
-          <a:p>
-            <a:pPr algn="ctr"/>
-          </a:p>
-        </p:txBody>
-      </p:sp>
-      <p:sp>
-        <p:nvSpPr>
-          <p:cNvPr id="5" name="장식"/>
-          <p:cNvSpPr/>
-          <p:nvPr/>
-        </p:nvSpPr>
-        <p:spPr>
-          <a:xfrm>
-            <a:off x="5931695" y="555182"/>
-            <a:ext cx="118957" cy="118957"/>
-          </a:xfrm>
-          <a:prstGeom prst="ellipse">
-            <a:avLst/>
-          </a:prstGeom>
-          <a:solidFill>
-            <a:srgbClr val="F5E3CC"/>
-          </a:solidFill>
-          <a:ln>
-            <a:noFill/>
-          </a:ln>
-        </p:spPr>
-        <p:txBody>
-          <a:bodyPr rtlCol="0" anchor="ctr"/>
-          <a:lstStyle/>
-          <a:p>
-            <a:pPr algn="ctr"/>
-          </a:p>
-        </p:txBody>
-      </p:sp>
-      <p:sp>
-        <p:nvSpPr>
-          <p:cNvPr id="6" name="장식"/>
-          <p:cNvSpPr/>
-          <p:nvPr/>
-        </p:nvSpPr>
-        <p:spPr>
-          <a:xfrm>
-            <a:off x="6212514" y="1260630"/>
-            <a:ext cx="126058" cy="126058"/>
-          </a:xfrm>
-          <a:prstGeom prst="ellipse">
-            <a:avLst/>
-          </a:prstGeom>
-          <a:solidFill>
-            <a:srgbClr val="3B8B91"/>
-          </a:solidFill>
-          <a:ln>
-            <a:noFill/>
-          </a:ln>
-        </p:spPr>
-        <p:txBody>
-          <a:bodyPr rtlCol="0" anchor="ctr"/>
-          <a:lstStyle/>
-          <a:p>
-            <a:pPr algn="ctr"/>
-          </a:p>
-        </p:txBody>
-      </p:sp>
-      <p:sp>
-        <p:nvSpPr>
-          <p:cNvPr id="7" name="장식"/>
-          <p:cNvSpPr/>
-          <p:nvPr/>
-        </p:nvSpPr>
-        <p:spPr>
-          <a:xfrm>
-            <a:off x="6044238" y="601087"/>
-            <a:ext cx="93564" cy="93564"/>
-          </a:xfrm>
-          <a:prstGeom prst="ellipse">
-            <a:avLst/>
-          </a:prstGeom>
-          <a:solidFill>
-            <a:srgbClr val="AE7429"/>
-          </a:solidFill>
-          <a:ln>
-            <a:noFill/>
-          </a:ln>
-        </p:spPr>
-        <p:txBody>
-          <a:bodyPr rtlCol="0" anchor="ctr"/>
-          <a:lstStyle/>
-          <a:p>
-            <a:pPr algn="ctr"/>
-          </a:p>
-        </p:txBody>
-      </p:sp>
-      <p:sp>
-        <p:nvSpPr>
-          <p:cNvPr id="8" name="장식"/>
-          <p:cNvSpPr/>
-          <p:nvPr/>
-        </p:nvSpPr>
-        <p:spPr>
-          <a:xfrm>
-            <a:off x="5499322" y="314922"/>
-            <a:ext cx="102193" cy="102193"/>
-          </a:xfrm>
-          <a:prstGeom prst="ellipse">
-            <a:avLst/>
-          </a:prstGeom>
-          <a:solidFill>
-            <a:srgbClr val="F5E3CC"/>
-          </a:solidFill>
-          <a:ln>
-            <a:noFill/>
-          </a:ln>
-        </p:spPr>
-        <p:txBody>
-          <a:bodyPr rtlCol="0" anchor="ctr"/>
-          <a:lstStyle/>
-          <a:p>
-            <a:pPr algn="ctr"/>
-          </a:p>
-        </p:txBody>
-      </p:sp>
-      <p:sp>
-        <p:nvSpPr>
-          <p:cNvPr id="9" name="장식"/>
-          <p:cNvSpPr/>
-          <p:nvPr/>
-        </p:nvSpPr>
-        <p:spPr>
-          <a:xfrm>
-            <a:off x="6396033" y="1170282"/>
-            <a:ext cx="168803" cy="168803"/>
-          </a:xfrm>
-          <a:prstGeom prst="ellipse">
-            <a:avLst/>
-          </a:prstGeom>
-          <a:solidFill>
-            <a:srgbClr val="3B8B91"/>
-          </a:solidFill>
-          <a:ln>
-            <a:noFill/>
-          </a:ln>
-        </p:spPr>
-        <p:txBody>
-          <a:bodyPr rtlCol="0" anchor="ctr"/>
-          <a:lstStyle/>
-          <a:p>
-            <a:pPr algn="ctr"/>
-          </a:p>
-        </p:txBody>
-      </p:sp>
-      <p:sp>
-        <p:nvSpPr>
-          <p:cNvPr id="10" name="장식"/>
-          <p:cNvSpPr/>
-          <p:nvPr/>
-        </p:nvSpPr>
-        <p:spPr>
-          <a:xfrm>
-            <a:off x="6106101" y="376285"/>
-            <a:ext cx="196620" cy="196620"/>
-          </a:xfrm>
-          <a:prstGeom prst="ellipse">
-            <a:avLst/>
-          </a:prstGeom>
-          <a:solidFill>
-            <a:srgbClr val="AE7429"/>
-          </a:solidFill>
-          <a:ln>
-            <a:noFill/>
-          </a:ln>
-        </p:spPr>
-        <p:txBody>
-          <a:bodyPr rtlCol="0" anchor="ctr"/>
-          <a:lstStyle/>
-          <a:p>
-            <a:pPr algn="ctr"/>
-          </a:p>
-        </p:txBody>
-      </p:sp>
-      <p:sp>
-        <p:nvSpPr>
-          <p:cNvPr id="11" name="장식"/>
-          <p:cNvSpPr/>
-          <p:nvPr/>
-        </p:nvSpPr>
-        <p:spPr>
-          <a:xfrm>
-            <a:off x="5766836" y="396632"/>
-            <a:ext cx="154484" cy="154484"/>
-          </a:xfrm>
-          <a:prstGeom prst="ellipse">
-            <a:avLst/>
-          </a:prstGeom>
-          <a:solidFill>
-            <a:srgbClr val="F5E3CC"/>
-          </a:solidFill>
-          <a:ln>
-            <a:noFill/>
-          </a:ln>
-        </p:spPr>
-        <p:txBody>
-          <a:bodyPr rtlCol="0" anchor="ctr"/>
-          <a:lstStyle/>
-          <a:p>
-            <a:pPr algn="ctr"/>
-          </a:p>
-        </p:txBody>
-      </p:sp>
-      <p:sp>
-        <p:nvSpPr>
-          <p:cNvPr id="12" name="장식"/>
-          <p:cNvSpPr/>
-          <p:nvPr/>
-        </p:nvSpPr>
-        <p:spPr>
-          <a:xfrm>
-            <a:off x="6479657" y="760719"/>
-            <a:ext cx="116170" cy="116170"/>
-          </a:xfrm>
-          <a:prstGeom prst="ellipse">
-            <a:avLst/>
-          </a:prstGeom>
-          <a:solidFill>
-            <a:srgbClr val="3B8B91"/>
-          </a:solidFill>
-          <a:ln>
-            <a:noFill/>
-          </a:ln>
-        </p:spPr>
-        <p:txBody>
-          <a:bodyPr rtlCol="0" anchor="ctr"/>
-          <a:lstStyle/>
-          <a:p>
-            <a:pPr algn="ctr"/>
-          </a:p>
-        </p:txBody>
-      </p:sp>
-      <p:sp>
-        <p:nvSpPr>
-          <p:cNvPr id="13" name="장식"/>
-          <p:cNvSpPr/>
-          <p:nvPr/>
-        </p:nvSpPr>
-        <p:spPr>
-          <a:xfrm>
-            <a:off x="6239530" y="943562"/>
-            <a:ext cx="136804" cy="136804"/>
-          </a:xfrm>
-          <a:prstGeom prst="ellipse">
-            <a:avLst/>
-          </a:prstGeom>
-          <a:solidFill>
-            <a:srgbClr val="AE7429"/>
-          </a:solidFill>
-          <a:ln>
-            <a:noFill/>
-          </a:ln>
-        </p:spPr>
-        <p:txBody>
-          <a:bodyPr rtlCol="0" anchor="ctr"/>
-          <a:lstStyle/>
-          <a:p>
-            <a:pPr algn="ctr"/>
-          </a:p>
-        </p:txBody>
-      </p:sp>
-      <p:sp>
-        <p:nvSpPr>
-          <p:cNvPr id="14" name="장식"/>
-          <p:cNvSpPr/>
-          <p:nvPr/>
-        </p:nvSpPr>
-        <p:spPr>
-          <a:xfrm>
-            <a:off x="5530304" y="217553"/>
-            <a:ext cx="159934" cy="159934"/>
-          </a:xfrm>
-          <a:prstGeom prst="ellipse">
-            <a:avLst/>
-          </a:prstGeom>
-          <a:solidFill>
-            <a:srgbClr val="F5E3CC"/>
-          </a:solidFill>
-          <a:ln>
-            <a:noFill/>
-          </a:ln>
-        </p:spPr>
-        <p:txBody>
-          <a:bodyPr rtlCol="0" anchor="ctr"/>
-          <a:lstStyle/>
-          <a:p>
-            <a:pPr algn="ctr"/>
-          </a:p>
-        </p:txBody>
-      </p:sp>
-      <p:sp>
-        <p:nvSpPr>
           <p:cNvPr id="2" name="Title 1"/>
           <p:cNvSpPr>
             <a:spLocks noGrp="1"/>
@@ -5778,14 +4141,14 @@
                   <a:srgbClr val="FFFFFF"/>
                 </a:solidFill>
               </a:rPr>
-              <a:t>작은 기쁨을 놓치지 마세요</a:t>
-            </a:r>
-          </a:p>
-        </p:txBody>
-      </p:sp>
-      <p:sp>
-        <p:nvSpPr>
-          <p:cNvPr id="15" name="번호"/>
+              <a:t>퇴근길 한 정거장 걷기</a:t>
+            </a:r>
+          </a:p>
+        </p:txBody>
+      </p:sp>
+      <p:sp>
+        <p:nvSpPr>
+          <p:cNvPr id="4" name="번호"/>
           <p:cNvSpPr txBox="1"/>
           <p:nvPr/>
         </p:nvSpPr>
@@ -5823,7 +4186,7 @@
       </p:sp>
       <p:sp>
         <p:nvSpPr>
-          <p:cNvPr id="16" name="본문"/>
+          <p:cNvPr id="5" name="본문"/>
           <p:cNvSpPr txBox="1"/>
           <p:nvPr/>
         </p:nvSpPr>
@@ -5854,14 +4217,14 @@
                   <a:srgbClr val="2B2B2B"/>
                 </a:solidFill>
               </a:rPr>
-              <a:t>따뜻한 차 한 잔, 좋은 노래 한 곡이면 충분해요.</a:t>
-            </a:r>
-          </a:p>
-        </p:txBody>
-      </p:sp>
-      <p:sp>
-        <p:nvSpPr>
-          <p:cNvPr id="17" name="쪽 번호"/>
+              <a:t>한 정거장 먼저 내려 걸으면 머리가 정리돼요.</a:t>
+            </a:r>
+          </a:p>
+        </p:txBody>
+      </p:sp>
+      <p:sp>
+        <p:nvSpPr>
+          <p:cNvPr id="6" name="쪽 번호"/>
           <p:cNvSpPr txBox="1"/>
           <p:nvPr/>
         </p:nvSpPr>
@@ -5954,325 +4317,6 @@
       </p:sp>
       <p:sp>
         <p:nvSpPr>
-          <p:cNvPr id="4" name="장식"/>
-          <p:cNvSpPr/>
-          <p:nvPr/>
-        </p:nvSpPr>
-        <p:spPr>
-          <a:xfrm>
-            <a:off x="5357381" y="489607"/>
-            <a:ext cx="195353" cy="195353"/>
-          </a:xfrm>
-          <a:prstGeom prst="ellipse">
-            <a:avLst/>
-          </a:prstGeom>
-          <a:solidFill>
-            <a:srgbClr val="AE7429"/>
-          </a:solidFill>
-          <a:ln>
-            <a:noFill/>
-          </a:ln>
-        </p:spPr>
-        <p:txBody>
-          <a:bodyPr rtlCol="0" anchor="ctr"/>
-          <a:lstStyle/>
-          <a:p>
-            <a:pPr algn="ctr"/>
-          </a:p>
-        </p:txBody>
-      </p:sp>
-      <p:sp>
-        <p:nvSpPr>
-          <p:cNvPr id="5" name="장식"/>
-          <p:cNvSpPr/>
-          <p:nvPr/>
-        </p:nvSpPr>
-        <p:spPr>
-          <a:xfrm>
-            <a:off x="5931695" y="555182"/>
-            <a:ext cx="118957" cy="118957"/>
-          </a:xfrm>
-          <a:prstGeom prst="ellipse">
-            <a:avLst/>
-          </a:prstGeom>
-          <a:solidFill>
-            <a:srgbClr val="F5E3CC"/>
-          </a:solidFill>
-          <a:ln>
-            <a:noFill/>
-          </a:ln>
-        </p:spPr>
-        <p:txBody>
-          <a:bodyPr rtlCol="0" anchor="ctr"/>
-          <a:lstStyle/>
-          <a:p>
-            <a:pPr algn="ctr"/>
-          </a:p>
-        </p:txBody>
-      </p:sp>
-      <p:sp>
-        <p:nvSpPr>
-          <p:cNvPr id="6" name="장식"/>
-          <p:cNvSpPr/>
-          <p:nvPr/>
-        </p:nvSpPr>
-        <p:spPr>
-          <a:xfrm>
-            <a:off x="6212514" y="1260630"/>
-            <a:ext cx="126058" cy="126058"/>
-          </a:xfrm>
-          <a:prstGeom prst="ellipse">
-            <a:avLst/>
-          </a:prstGeom>
-          <a:solidFill>
-            <a:srgbClr val="3B8B91"/>
-          </a:solidFill>
-          <a:ln>
-            <a:noFill/>
-          </a:ln>
-        </p:spPr>
-        <p:txBody>
-          <a:bodyPr rtlCol="0" anchor="ctr"/>
-          <a:lstStyle/>
-          <a:p>
-            <a:pPr algn="ctr"/>
-          </a:p>
-        </p:txBody>
-      </p:sp>
-      <p:sp>
-        <p:nvSpPr>
-          <p:cNvPr id="7" name="장식"/>
-          <p:cNvSpPr/>
-          <p:nvPr/>
-        </p:nvSpPr>
-        <p:spPr>
-          <a:xfrm>
-            <a:off x="6044238" y="601087"/>
-            <a:ext cx="93564" cy="93564"/>
-          </a:xfrm>
-          <a:prstGeom prst="ellipse">
-            <a:avLst/>
-          </a:prstGeom>
-          <a:solidFill>
-            <a:srgbClr val="AE7429"/>
-          </a:solidFill>
-          <a:ln>
-            <a:noFill/>
-          </a:ln>
-        </p:spPr>
-        <p:txBody>
-          <a:bodyPr rtlCol="0" anchor="ctr"/>
-          <a:lstStyle/>
-          <a:p>
-            <a:pPr algn="ctr"/>
-          </a:p>
-        </p:txBody>
-      </p:sp>
-      <p:sp>
-        <p:nvSpPr>
-          <p:cNvPr id="8" name="장식"/>
-          <p:cNvSpPr/>
-          <p:nvPr/>
-        </p:nvSpPr>
-        <p:spPr>
-          <a:xfrm>
-            <a:off x="5499322" y="314922"/>
-            <a:ext cx="102193" cy="102193"/>
-          </a:xfrm>
-          <a:prstGeom prst="ellipse">
-            <a:avLst/>
-          </a:prstGeom>
-          <a:solidFill>
-            <a:srgbClr val="F5E3CC"/>
-          </a:solidFill>
-          <a:ln>
-            <a:noFill/>
-          </a:ln>
-        </p:spPr>
-        <p:txBody>
-          <a:bodyPr rtlCol="0" anchor="ctr"/>
-          <a:lstStyle/>
-          <a:p>
-            <a:pPr algn="ctr"/>
-          </a:p>
-        </p:txBody>
-      </p:sp>
-      <p:sp>
-        <p:nvSpPr>
-          <p:cNvPr id="9" name="장식"/>
-          <p:cNvSpPr/>
-          <p:nvPr/>
-        </p:nvSpPr>
-        <p:spPr>
-          <a:xfrm>
-            <a:off x="6396033" y="1170282"/>
-            <a:ext cx="168803" cy="168803"/>
-          </a:xfrm>
-          <a:prstGeom prst="ellipse">
-            <a:avLst/>
-          </a:prstGeom>
-          <a:solidFill>
-            <a:srgbClr val="3B8B91"/>
-          </a:solidFill>
-          <a:ln>
-            <a:noFill/>
-          </a:ln>
-        </p:spPr>
-        <p:txBody>
-          <a:bodyPr rtlCol="0" anchor="ctr"/>
-          <a:lstStyle/>
-          <a:p>
-            <a:pPr algn="ctr"/>
-          </a:p>
-        </p:txBody>
-      </p:sp>
-      <p:sp>
-        <p:nvSpPr>
-          <p:cNvPr id="10" name="장식"/>
-          <p:cNvSpPr/>
-          <p:nvPr/>
-        </p:nvSpPr>
-        <p:spPr>
-          <a:xfrm>
-            <a:off x="6106101" y="376285"/>
-            <a:ext cx="196620" cy="196620"/>
-          </a:xfrm>
-          <a:prstGeom prst="ellipse">
-            <a:avLst/>
-          </a:prstGeom>
-          <a:solidFill>
-            <a:srgbClr val="AE7429"/>
-          </a:solidFill>
-          <a:ln>
-            <a:noFill/>
-          </a:ln>
-        </p:spPr>
-        <p:txBody>
-          <a:bodyPr rtlCol="0" anchor="ctr"/>
-          <a:lstStyle/>
-          <a:p>
-            <a:pPr algn="ctr"/>
-          </a:p>
-        </p:txBody>
-      </p:sp>
-      <p:sp>
-        <p:nvSpPr>
-          <p:cNvPr id="11" name="장식"/>
-          <p:cNvSpPr/>
-          <p:nvPr/>
-        </p:nvSpPr>
-        <p:spPr>
-          <a:xfrm>
-            <a:off x="5766836" y="396632"/>
-            <a:ext cx="154484" cy="154484"/>
-          </a:xfrm>
-          <a:prstGeom prst="ellipse">
-            <a:avLst/>
-          </a:prstGeom>
-          <a:solidFill>
-            <a:srgbClr val="F5E3CC"/>
-          </a:solidFill>
-          <a:ln>
-            <a:noFill/>
-          </a:ln>
-        </p:spPr>
-        <p:txBody>
-          <a:bodyPr rtlCol="0" anchor="ctr"/>
-          <a:lstStyle/>
-          <a:p>
-            <a:pPr algn="ctr"/>
-          </a:p>
-        </p:txBody>
-      </p:sp>
-      <p:sp>
-        <p:nvSpPr>
-          <p:cNvPr id="12" name="장식"/>
-          <p:cNvSpPr/>
-          <p:nvPr/>
-        </p:nvSpPr>
-        <p:spPr>
-          <a:xfrm>
-            <a:off x="6479657" y="760719"/>
-            <a:ext cx="116170" cy="116170"/>
-          </a:xfrm>
-          <a:prstGeom prst="ellipse">
-            <a:avLst/>
-          </a:prstGeom>
-          <a:solidFill>
-            <a:srgbClr val="3B8B91"/>
-          </a:solidFill>
-          <a:ln>
-            <a:noFill/>
-          </a:ln>
-        </p:spPr>
-        <p:txBody>
-          <a:bodyPr rtlCol="0" anchor="ctr"/>
-          <a:lstStyle/>
-          <a:p>
-            <a:pPr algn="ctr"/>
-          </a:p>
-        </p:txBody>
-      </p:sp>
-      <p:sp>
-        <p:nvSpPr>
-          <p:cNvPr id="13" name="장식"/>
-          <p:cNvSpPr/>
-          <p:nvPr/>
-        </p:nvSpPr>
-        <p:spPr>
-          <a:xfrm>
-            <a:off x="6239530" y="943562"/>
-            <a:ext cx="136804" cy="136804"/>
-          </a:xfrm>
-          <a:prstGeom prst="ellipse">
-            <a:avLst/>
-          </a:prstGeom>
-          <a:solidFill>
-            <a:srgbClr val="AE7429"/>
-          </a:solidFill>
-          <a:ln>
-            <a:noFill/>
-          </a:ln>
-        </p:spPr>
-        <p:txBody>
-          <a:bodyPr rtlCol="0" anchor="ctr"/>
-          <a:lstStyle/>
-          <a:p>
-            <a:pPr algn="ctr"/>
-          </a:p>
-        </p:txBody>
-      </p:sp>
-      <p:sp>
-        <p:nvSpPr>
-          <p:cNvPr id="14" name="장식"/>
-          <p:cNvSpPr/>
-          <p:nvPr/>
-        </p:nvSpPr>
-        <p:spPr>
-          <a:xfrm>
-            <a:off x="5530304" y="217553"/>
-            <a:ext cx="159934" cy="159934"/>
-          </a:xfrm>
-          <a:prstGeom prst="ellipse">
-            <a:avLst/>
-          </a:prstGeom>
-          <a:solidFill>
-            <a:srgbClr val="F5E3CC"/>
-          </a:solidFill>
-          <a:ln>
-            <a:noFill/>
-          </a:ln>
-        </p:spPr>
-        <p:txBody>
-          <a:bodyPr rtlCol="0" anchor="ctr"/>
-          <a:lstStyle/>
-          <a:p>
-            <a:pPr algn="ctr"/>
-          </a:p>
-        </p:txBody>
-      </p:sp>
-      <p:sp>
-        <p:nvSpPr>
           <p:cNvPr id="2" name="Title 1"/>
           <p:cNvSpPr>
             <a:spLocks noGrp="1"/>
@@ -6304,14 +4348,14 @@
                   <a:srgbClr val="FFFFFF"/>
                 </a:solidFill>
               </a:rPr>
-              <a:t>내일은 내일의 해가 떠요</a:t>
-            </a:r>
-          </a:p>
-        </p:txBody>
-      </p:sp>
-      <p:sp>
-        <p:nvSpPr>
-          <p:cNvPr id="15" name="번호"/>
+              <a:t>오늘은 일찍 자기</a:t>
+            </a:r>
+          </a:p>
+        </p:txBody>
+      </p:sp>
+      <p:sp>
+        <p:nvSpPr>
+          <p:cNvPr id="4" name="번호"/>
           <p:cNvSpPr txBox="1"/>
           <p:nvPr/>
         </p:nvSpPr>
@@ -6349,7 +4393,7 @@
       </p:sp>
       <p:sp>
         <p:nvSpPr>
-          <p:cNvPr id="16" name="본문"/>
+          <p:cNvPr id="5" name="본문"/>
           <p:cNvSpPr txBox="1"/>
           <p:nvPr/>
         </p:nvSpPr>
@@ -6380,14 +4424,14 @@
                   <a:srgbClr val="2B2B2B"/>
                 </a:solidFill>
               </a:rPr>
-              <a:t>오늘은 푹 쉬고 내일 다시 시작해요.</a:t>
-            </a:r>
-          </a:p>
-        </p:txBody>
-      </p:sp>
-      <p:sp>
-        <p:nvSpPr>
-          <p:cNvPr id="17" name="쪽 번호"/>
+              <a:t>미룬 일은 내일 해도 돼요. 오늘은 불을 일찍 끄세요.</a:t>
+            </a:r>
+          </a:p>
+        </p:txBody>
+      </p:sp>
+      <p:sp>
+        <p:nvSpPr>
+          <p:cNvPr id="6" name="쪽 번호"/>
           <p:cNvSpPr txBox="1"/>
           <p:nvPr/>
         </p:nvSpPr>
@@ -6434,14 +4478,6 @@
 <file path=ppt/slides/slide7.xml><?xml version="1.0" encoding="utf-8"?>
 <p:sld xmlns:a="http://schemas.openxmlformats.org/drawingml/2006/main" xmlns:p="http://schemas.openxmlformats.org/presentationml/2006/main" xmlns:r="http://schemas.openxmlformats.org/officeDocument/2006/relationships">
   <p:cSld>
-    <p:bg>
-      <p:bgPr>
-        <a:solidFill>
-          <a:srgbClr val="FFFFFF"/>
-        </a:solidFill>
-        <a:effectLst/>
-      </p:bgPr>
-    </p:bg>
     <p:spTree>
       <p:nvGrpSpPr>
         <p:cNvPr id="1" name=""/>
@@ -6449,383 +4485,30 @@
         <p:nvPr/>
       </p:nvGrpSpPr>
       <p:grpSpPr/>
-      <p:sp>
-        <p:nvSpPr>
-          <p:cNvPr id="3" name="장식"/>
-          <p:cNvSpPr/>
+      <p:pic>
+        <p:nvPicPr>
+          <p:cNvPr id="3" name="표지 그림" descr="news-40.jpg"/>
+          <p:cNvPicPr>
+            <a:picLocks noChangeAspect="1"/>
+          </p:cNvPicPr>
           <p:nvPr/>
-        </p:nvSpPr>
-        <p:spPr>
-          <a:xfrm>
-            <a:off x="0" y="2057400"/>
-            <a:ext cx="5760720" cy="1828800"/>
-          </a:xfrm>
-          <a:prstGeom prst="homePlate">
-            <a:avLst/>
-          </a:prstGeom>
-          <a:solidFill>
-            <a:srgbClr val="AE7429"/>
-          </a:solidFill>
-          <a:ln>
-            <a:noFill/>
-          </a:ln>
-        </p:spPr>
-        <p:txBody>
-          <a:bodyPr rtlCol="0" anchor="ctr"/>
-          <a:lstStyle/>
-          <a:p>
-            <a:pPr algn="ctr"/>
-          </a:p>
-        </p:txBody>
-      </p:sp>
-      <p:sp>
-        <p:nvSpPr>
-          <p:cNvPr id="4" name="장식"/>
-          <p:cNvSpPr/>
-          <p:nvPr/>
-        </p:nvSpPr>
-        <p:spPr>
-          <a:xfrm>
-            <a:off x="0" y="3886200"/>
-            <a:ext cx="5349240" cy="64008"/>
+        </p:nvPicPr>
+        <p:blipFill>
+          <a:blip r:embed="rId2"/>
+          <a:stretch>
+            <a:fillRect/>
+          </a:stretch>
+        </p:blipFill>
+        <p:spPr>
+          <a:xfrm>
+            <a:off x="0" y="0"/>
+            <a:ext cx="6858000" cy="6858000"/>
           </a:xfrm>
           <a:prstGeom prst="rect">
             <a:avLst/>
           </a:prstGeom>
-          <a:solidFill>
-            <a:srgbClr val="3B8B91"/>
-          </a:solidFill>
-          <a:ln>
-            <a:noFill/>
-          </a:ln>
-        </p:spPr>
-        <p:txBody>
-          <a:bodyPr rtlCol="0" anchor="ctr"/>
-          <a:lstStyle/>
-          <a:p>
-            <a:pPr algn="ctr"/>
-          </a:p>
-        </p:txBody>
-      </p:sp>
-      <p:sp>
-        <p:nvSpPr>
-          <p:cNvPr id="5" name="장식"/>
-          <p:cNvSpPr/>
-          <p:nvPr/>
-        </p:nvSpPr>
-        <p:spPr>
-          <a:xfrm>
-            <a:off x="4570092" y="704815"/>
-            <a:ext cx="452864" cy="452864"/>
-          </a:xfrm>
-          <a:prstGeom prst="ellipse">
-            <a:avLst/>
-          </a:prstGeom>
-          <a:solidFill>
-            <a:srgbClr val="AE7429"/>
-          </a:solidFill>
-          <a:ln>
-            <a:noFill/>
-          </a:ln>
-        </p:spPr>
-        <p:txBody>
-          <a:bodyPr rtlCol="0" anchor="ctr"/>
-          <a:lstStyle/>
-          <a:p>
-            <a:pPr algn="ctr"/>
-          </a:p>
-        </p:txBody>
-      </p:sp>
-      <p:sp>
-        <p:nvSpPr>
-          <p:cNvPr id="6" name="장식"/>
-          <p:cNvSpPr/>
-          <p:nvPr/>
-        </p:nvSpPr>
-        <p:spPr>
-          <a:xfrm>
-            <a:off x="5901455" y="856829"/>
-            <a:ext cx="275764" cy="275764"/>
-          </a:xfrm>
-          <a:prstGeom prst="ellipse">
-            <a:avLst/>
-          </a:prstGeom>
-          <a:solidFill>
-            <a:srgbClr val="F5E3CC"/>
-          </a:solidFill>
-          <a:ln>
-            <a:noFill/>
-          </a:ln>
-        </p:spPr>
-        <p:txBody>
-          <a:bodyPr rtlCol="0" anchor="ctr"/>
-          <a:lstStyle/>
-          <a:p>
-            <a:pPr algn="ctr"/>
-          </a:p>
-        </p:txBody>
-      </p:sp>
-      <p:sp>
-        <p:nvSpPr>
-          <p:cNvPr id="7" name="장식"/>
-          <p:cNvSpPr/>
-          <p:nvPr/>
-        </p:nvSpPr>
-        <p:spPr>
-          <a:xfrm>
-            <a:off x="6552446" y="2492187"/>
-            <a:ext cx="292227" cy="292227"/>
-          </a:xfrm>
-          <a:prstGeom prst="ellipse">
-            <a:avLst/>
-          </a:prstGeom>
-          <a:solidFill>
-            <a:srgbClr val="3B8B91"/>
-          </a:solidFill>
-          <a:ln>
-            <a:noFill/>
-          </a:ln>
-        </p:spPr>
-        <p:txBody>
-          <a:bodyPr rtlCol="0" anchor="ctr"/>
-          <a:lstStyle/>
-          <a:p>
-            <a:pPr algn="ctr"/>
-          </a:p>
-        </p:txBody>
-      </p:sp>
-      <p:sp>
-        <p:nvSpPr>
-          <p:cNvPr id="8" name="장식"/>
-          <p:cNvSpPr/>
-          <p:nvPr/>
-        </p:nvSpPr>
-        <p:spPr>
-          <a:xfrm>
-            <a:off x="6162350" y="963247"/>
-            <a:ext cx="216899" cy="216899"/>
-          </a:xfrm>
-          <a:prstGeom prst="ellipse">
-            <a:avLst/>
-          </a:prstGeom>
-          <a:solidFill>
-            <a:srgbClr val="AE7429"/>
-          </a:solidFill>
-          <a:ln>
-            <a:noFill/>
-          </a:ln>
-        </p:spPr>
-        <p:txBody>
-          <a:bodyPr rtlCol="0" anchor="ctr"/>
-          <a:lstStyle/>
-          <a:p>
-            <a:pPr algn="ctr"/>
-          </a:p>
-        </p:txBody>
-      </p:sp>
-      <p:sp>
-        <p:nvSpPr>
-          <p:cNvPr id="9" name="장식"/>
-          <p:cNvSpPr/>
-          <p:nvPr/>
-        </p:nvSpPr>
-        <p:spPr>
-          <a:xfrm>
-            <a:off x="4899137" y="299863"/>
-            <a:ext cx="236902" cy="236902"/>
-          </a:xfrm>
-          <a:prstGeom prst="ellipse">
-            <a:avLst/>
-          </a:prstGeom>
-          <a:solidFill>
-            <a:srgbClr val="F5E3CC"/>
-          </a:solidFill>
-          <a:ln>
-            <a:noFill/>
-          </a:ln>
-        </p:spPr>
-        <p:txBody>
-          <a:bodyPr rtlCol="0" anchor="ctr"/>
-          <a:lstStyle/>
-          <a:p>
-            <a:pPr algn="ctr"/>
-          </a:p>
-        </p:txBody>
-      </p:sp>
-      <p:sp>
-        <p:nvSpPr>
-          <p:cNvPr id="10" name="장식"/>
-          <p:cNvSpPr/>
-          <p:nvPr/>
-        </p:nvSpPr>
-        <p:spPr>
-          <a:xfrm>
-            <a:off x="6977876" y="2282743"/>
-            <a:ext cx="391317" cy="391317"/>
-          </a:xfrm>
-          <a:prstGeom prst="ellipse">
-            <a:avLst/>
-          </a:prstGeom>
-          <a:solidFill>
-            <a:srgbClr val="3B8B91"/>
-          </a:solidFill>
-          <a:ln>
-            <a:noFill/>
-          </a:ln>
-        </p:spPr>
-        <p:txBody>
-          <a:bodyPr rtlCol="0" anchor="ctr"/>
-          <a:lstStyle/>
-          <a:p>
-            <a:pPr algn="ctr"/>
-          </a:p>
-        </p:txBody>
-      </p:sp>
-      <p:sp>
-        <p:nvSpPr>
-          <p:cNvPr id="11" name="장식"/>
-          <p:cNvSpPr/>
-          <p:nvPr/>
-        </p:nvSpPr>
-        <p:spPr>
-          <a:xfrm>
-            <a:off x="6305761" y="442115"/>
-            <a:ext cx="455801" cy="455801"/>
-          </a:xfrm>
-          <a:prstGeom prst="ellipse">
-            <a:avLst/>
-          </a:prstGeom>
-          <a:solidFill>
-            <a:srgbClr val="AE7429"/>
-          </a:solidFill>
-          <a:ln>
-            <a:noFill/>
-          </a:ln>
-        </p:spPr>
-        <p:txBody>
-          <a:bodyPr rtlCol="0" anchor="ctr"/>
-          <a:lstStyle/>
-          <a:p>
-            <a:pPr algn="ctr"/>
-          </a:p>
-        </p:txBody>
-      </p:sp>
-      <p:sp>
-        <p:nvSpPr>
-          <p:cNvPr id="12" name="장식"/>
-          <p:cNvSpPr/>
-          <p:nvPr/>
-        </p:nvSpPr>
-        <p:spPr>
-          <a:xfrm>
-            <a:off x="5519281" y="489281"/>
-            <a:ext cx="358123" cy="358123"/>
-          </a:xfrm>
-          <a:prstGeom prst="ellipse">
-            <a:avLst/>
-          </a:prstGeom>
-          <a:solidFill>
-            <a:srgbClr val="F5E3CC"/>
-          </a:solidFill>
-          <a:ln>
-            <a:noFill/>
-          </a:ln>
-        </p:spPr>
-        <p:txBody>
-          <a:bodyPr rtlCol="0" anchor="ctr"/>
-          <a:lstStyle/>
-          <a:p>
-            <a:pPr algn="ctr"/>
-          </a:p>
-        </p:txBody>
-      </p:sp>
-      <p:sp>
-        <p:nvSpPr>
-          <p:cNvPr id="13" name="장식"/>
-          <p:cNvSpPr/>
-          <p:nvPr/>
-        </p:nvSpPr>
-        <p:spPr>
-          <a:xfrm>
-            <a:off x="7171730" y="1333302"/>
-            <a:ext cx="269303" cy="269303"/>
-          </a:xfrm>
-          <a:prstGeom prst="ellipse">
-            <a:avLst/>
-          </a:prstGeom>
-          <a:solidFill>
-            <a:srgbClr val="3B8B91"/>
-          </a:solidFill>
-          <a:ln>
-            <a:noFill/>
-          </a:ln>
-        </p:spPr>
-        <p:txBody>
-          <a:bodyPr rtlCol="0" anchor="ctr"/>
-          <a:lstStyle/>
-          <a:p>
-            <a:pPr algn="ctr"/>
-          </a:p>
-        </p:txBody>
-      </p:sp>
-      <p:sp>
-        <p:nvSpPr>
-          <p:cNvPr id="14" name="장식"/>
-          <p:cNvSpPr/>
-          <p:nvPr/>
-        </p:nvSpPr>
-        <p:spPr>
-          <a:xfrm>
-            <a:off x="6615073" y="1757165"/>
-            <a:ext cx="317138" cy="317138"/>
-          </a:xfrm>
-          <a:prstGeom prst="ellipse">
-            <a:avLst/>
-          </a:prstGeom>
-          <a:solidFill>
-            <a:srgbClr val="AE7429"/>
-          </a:solidFill>
-          <a:ln>
-            <a:noFill/>
-          </a:ln>
-        </p:spPr>
-        <p:txBody>
-          <a:bodyPr rtlCol="0" anchor="ctr"/>
-          <a:lstStyle/>
-          <a:p>
-            <a:pPr algn="ctr"/>
-          </a:p>
-        </p:txBody>
-      </p:sp>
-      <p:sp>
-        <p:nvSpPr>
-          <p:cNvPr id="15" name="장식"/>
-          <p:cNvSpPr/>
-          <p:nvPr/>
-        </p:nvSpPr>
-        <p:spPr>
-          <a:xfrm>
-            <a:off x="4970957" y="74145"/>
-            <a:ext cx="370756" cy="370756"/>
-          </a:xfrm>
-          <a:prstGeom prst="ellipse">
-            <a:avLst/>
-          </a:prstGeom>
-          <a:solidFill>
-            <a:srgbClr val="F5E3CC"/>
-          </a:solidFill>
-          <a:ln>
-            <a:noFill/>
-          </a:ln>
-        </p:spPr>
-        <p:txBody>
-          <a:bodyPr rtlCol="0" anchor="ctr"/>
-          <a:lstStyle/>
-          <a:p>
-            <a:pPr algn="ctr"/>
-          </a:p>
-        </p:txBody>
-      </p:sp>
+        </p:spPr>
+      </p:pic>
       <p:sp>
         <p:nvSpPr>
           <p:cNvPr id="2" name="Title 1"/>
@@ -6838,8 +4521,8 @@
         </p:nvSpPr>
         <p:spPr>
           <a:xfrm>
-            <a:off x="411479" y="2167128"/>
-            <a:ext cx="4937759" cy="1609344"/>
+            <a:off x="685800" y="960120"/>
+            <a:ext cx="5486400" cy="1463040"/>
           </a:xfrm>
         </p:spPr>
         <p:txBody>
@@ -6856,7 +4539,7 @@
             <a:r>
               <a:rPr sz="2800" b="1" i="0">
                 <a:solidFill>
-                  <a:srgbClr val="FFFFFF"/>
+                  <a:srgbClr val="5B3D15"/>
                 </a:solidFill>
               </a:rPr>
               <a:t>저장해 두고 필요할 때 꺼내 보세요</a:t>
@@ -6866,14 +4549,14 @@
       </p:sp>
       <p:sp>
         <p:nvSpPr>
-          <p:cNvPr id="16" name="한 줄 문구"/>
+          <p:cNvPr id="4" name="한 줄 문구"/>
           <p:cNvSpPr txBox="1"/>
           <p:nvPr/>
         </p:nvSpPr>
         <p:spPr>
           <a:xfrm>
-            <a:off x="411479" y="4160520"/>
-            <a:ext cx="4800600" cy="822960"/>
+            <a:off x="685800" y="2560320"/>
+            <a:ext cx="5486400" cy="822960"/>
           </a:xfrm>
           <a:prstGeom prst="rect">
             <a:avLst/>
@@ -6904,14 +4587,14 @@
       </p:sp>
       <p:sp>
         <p:nvSpPr>
-          <p:cNvPr id="17" name="안내 문구"/>
+          <p:cNvPr id="5" name="안내 문구"/>
           <p:cNvSpPr txBox="1"/>
           <p:nvPr/>
         </p:nvSpPr>
         <p:spPr>
           <a:xfrm>
-            <a:off x="411479" y="5029200"/>
-            <a:ext cx="4800600" cy="914400"/>
+            <a:off x="685800" y="3429000"/>
+            <a:ext cx="5486400" cy="914400"/>
           </a:xfrm>
           <a:prstGeom prst="rect">
             <a:avLst/>
